--- a/campus/downloads/genesys-cx-deck.pptx
+++ b/campus/downloads/genesys-cx-deck.pptx
@@ -6,6 +6,7 @@
     <p:sldId id="257" r:id="rId2"/>
     <p:sldId id="258" r:id="rId3"/>
     <p:sldId id="259" r:id="rId4"/>
+    <p:sldId id="260" r:id="rId5"/>
   </p:sldIdLst>
   <p:sldSz cx="9144000" cy="6858000" type="screen4x3"/>
   <p:notesSz cx="6858000" cy="9144000"/>
@@ -334,4 +335,109 @@
     <a:masterClrMapping/>
   </p:clrMapOvr>
 </p:sld>
+</file>
+
+<file path=ppt/slides/slide5.xml><?xml version="1.0" encoding="utf-8"?>
+<p:sld xmlns:a="http://schemas.openxmlformats.org/drawingml/2006/main" xmlns:r="http://schemas.openxmlformats.org/officeDocument/2006/relationships" xmlns:p="http://schemas.openxmlformats.org/presentationml/2006/main">
+  <p:cSld>
+    <p:spTree>
+      <p:nvGrpSpPr>
+        <p:cNvPr id="1" name=""/>
+        <p:cNvGrpSpPr/>
+        <p:nvPr/>
+      </p:nvGrpSpPr>
+      <p:grpSpPr>
+        <a:xfrm>
+          <a:off x="0" y="0"/>
+          <a:ext cx="0" cy="0"/>
+          <a:chOff x="0" y="0"/>
+          <a:chExt cx="0" cy="0"/>
+        </a:xfrm>
+      </p:grpSpPr>
+      <p:sp>
+        <p:nvSpPr>
+          <p:cNvPr id="2" name="Body"/>
+          <p:cNvSpPr/>
+          <p:nvPr/>
+        </p:nvSpPr>
+        <p:spPr>
+          <a:xfrm>
+            <a:off x="360000" y="280000"/>
+            <a:ext cx="8400000" cy="6200000"/>
+          </a:xfrm>
+          <a:prstGeom prst="rect">
+            <a:avLst/>
+          </a:prstGeom>
+        </p:spPr>
+        <p:txBody>
+          <a:bodyPr/>
+          <a:lstStyle/>
+          <a:p>
+            <a:r>
+              <a:rPr lang="en-US" sz="2800" b="1"/>
+              <a:t>Sources and go deeper</a:t>
+            </a:r>
+          </a:p>
+          <a:p>
+            <a:r>
+              <a:rPr lang="en-US" sz="1600"/>
+              <a:t>Sources and go deeper</a:t>
+            </a:r>
+          </a:p>
+          <a:p>
+            <a:r>
+              <a:rPr lang="en-US" sz="1600"/>
+              <a:t>Last checked 2026-10</a:t>
+            </a:r>
+          </a:p>
+          <a:p>
+            <a:r>
+              <a:rPr lang="en-US" sz="1600"/>
+              <a:t>About Architect (Resource Center) https://help.genesys.cloud/articles/about-architect/ Last checked 2026-10</a:t>
+            </a:r>
+          </a:p>
+          <a:p>
+            <a:r>
+              <a:rPr lang="en-US" sz="1600"/>
+              <a:t>Genesys Cloud Developer Center (Developer docs) https://developer.genesys.cloud/ Last checked 2026-10</a:t>
+            </a:r>
+          </a:p>
+          <a:p>
+            <a:r>
+              <a:rPr lang="en-US" sz="1600"/>
+              <a:t>  General developer docs. This is the Developer Center home, not a page written for this room alone.</a:t>
+            </a:r>
+          </a:p>
+          <a:p>
+            <a:r>
+              <a:rPr lang="en-US" sz="1600"/>
+              <a:t>Genesys Community (Community) https://community.genesys.com/ Last checked 2026-10</a:t>
+            </a:r>
+          </a:p>
+          <a:p>
+            <a:r>
+              <a:rPr lang="en-US" sz="1600"/>
+              <a:t>  Community home, not a thread about this room.</a:t>
+            </a:r>
+          </a:p>
+          <a:p>
+            <a:r>
+              <a:rPr lang="en-US" sz="1600"/>
+              <a:t>Genesys (company) (Wikipedia) https://en.wikipedia.org/wiki/Genesys_(company) Last checked 2026-10</a:t>
+            </a:r>
+          </a:p>
+          <a:p>
+            <a:r>
+              <a:rPr lang="en-US" sz="1600"/>
+              <a:t>  Background article. It is not a Genesys Cloud product page.</a:t>
+            </a:r>
+          </a:p>
+        </p:txBody>
+      </p:sp>
+    </p:spTree>
+  </p:cSld>
+  <p:clrMapOvr>
+    <a:masterClrMapping/>
+  </p:clrMapOvr>
+</p:sld>
 </file>